--- a/eric-talk/talk_3min.pptx
+++ b/eric-talk/talk_3min.pptx
@@ -15,8 +15,6 @@
     <p:sldId id="257" r:id="rId12"/>
     <p:sldId id="258" r:id="rId13"/>
     <p:sldId id="259" r:id="rId14"/>
-    <p:sldId id="260" r:id="rId15"/>
-    <p:sldId id="261" r:id="rId16"/>
   </p:sldIdLst>
   <p:sldSz cx="12192000" cy="6858000"/>
   <p:notesSz cx="6858000" cy="9144000"/>
@@ -10085,8 +10083,8 @@
           <a:lstStyle/>
           <a:p>
             <a:r>
-              <a:rPr sz="2800" b="1"/>
-              <a:t>Can LLMs Write Correct TLA+ Specifications?</a:t>
+              <a:rPr sz="3000" b="1"/>
+              <a:t>Teaching AI to Prove Software Is Bug-Free</a:t>
             </a:r>
           </a:p>
         </p:txBody>
@@ -10107,8 +10105,8 @@
           <a:lstStyle/>
           <a:p>
             <a:r>
-              <a:rPr sz="1400"/>
-              <a:t>Evaluating Natural-Language-to-TLA+ Generation</a:t>
+              <a:rPr sz="1500"/>
+              <a:t>The hardest lesson:  the AI will cheat unless you grade it honestly.</a:t>
             </a:r>
           </a:p>
         </p:txBody>
@@ -10129,8 +10127,8 @@
           <a:lstStyle/>
           <a:p>
             <a:r>
-              <a:rPr sz="900"/>
-              <a:t>AI4FM Research Group  |  Department of Computer Science</a:t>
+              <a:rPr sz="1000"/>
+              <a:t>Eric Spencer  |  AI for Formal Methods Lab  |  ai4fm.cs.luc.edu</a:t>
             </a:r>
           </a:p>
         </p:txBody>
@@ -10192,56 +10190,45 @@
           <a:p>
             <a:pPr>
               <a:spcAft>
-                <a:spcPts val="600"/>
+                <a:spcPts val="800"/>
               </a:spcAft>
             </a:pPr>
             <a:r>
-              <a:rPr sz="1400"/>
-              <a:t>A formal specification language -- describe system rules precisely enough for a computer to check them</a:t>
+              <a:rPr sz="1600"/>
+              <a:t>There is a fix: a mathematical language called TLA+ lets a computer prove a system is correct before it ships.</a:t>
             </a:r>
           </a:p>
           <a:p>
             <a:pPr>
               <a:spcAft>
-                <a:spcPts val="600"/>
+                <a:spcPts val="800"/>
               </a:spcAft>
             </a:pPr>
             <a:r>
-              <a:rPr sz="1400"/>
-              <a:t>Used at Amazon (DynamoDB, S3) and Microsoft Azure to catch bugs that testing misses</a:t>
+              <a:rPr sz="1600"/>
+              <a:t>Amazon, Microsoft, and Intel use it to catch bugs that testing misses.</a:t>
             </a:r>
           </a:p>
           <a:p>
             <a:pPr>
               <a:spcAft>
-                <a:spcPts val="600"/>
+                <a:spcPts val="800"/>
               </a:spcAft>
             </a:pPr>
             <a:r>
-              <a:rPr sz="1400"/>
-              <a:t>Two tools validate specs:  SANY checks syntax,  TLC checks correctness</a:t>
+              <a:rPr sz="1600"/>
+              <a:t>The catch: writing those proofs takes rare expertise. Most engineers cannot do it.</a:t>
             </a:r>
           </a:p>
           <a:p>
             <a:pPr>
               <a:spcAft>
-                <a:spcPts val="600"/>
+                <a:spcPts val="800"/>
               </a:spcAft>
             </a:pPr>
             <a:r>
-              <a:rPr sz="1400"/>
-              <a:t>Problem: writing TLA+ requires rare expertise, limiting adoption</a:t>
-            </a:r>
-          </a:p>
-          <a:p>
-            <a:pPr>
-              <a:spcAft>
-                <a:spcPts val="600"/>
-              </a:spcAft>
-            </a:pPr>
-            <a:r>
-              <a:rPr sz="1400"/>
-              <a:t>Our question: can AI bridge the gap between English and TLA+?</a:t>
+              <a:rPr sz="1600"/>
+              <a:t>The idea: if AI could write the proof from plain English, every engineer could use it.</a:t>
             </a:r>
           </a:p>
         </p:txBody>
@@ -10262,8 +10249,8 @@
           <a:lstStyle/>
           <a:p>
             <a:r>
-              <a:rPr sz="1300"/>
-              <a:t>A mathematical language for proving systems correct</a:t>
+              <a:rPr sz="1400"/>
+              <a:t>Bugs in critical software cost lives and billions of dollars.</a:t>
             </a:r>
           </a:p>
         </p:txBody>
@@ -10284,8 +10271,8 @@
           <a:lstStyle/>
           <a:p>
             <a:r>
-              <a:rPr sz="2800" b="1"/>
-              <a:t>What Is TLA+?</a:t>
+              <a:rPr sz="3000" b="1"/>
+              <a:t>The Problem</a:t>
             </a:r>
           </a:p>
         </p:txBody>
@@ -10342,45 +10329,61 @@
           <a:p>
             <a:pPr>
               <a:spcAft>
-                <a:spcPts val="600"/>
+                <a:spcPts val="800"/>
               </a:spcAft>
             </a:pPr>
             <a:r>
-              <a:rPr sz="1200"/>
-              <a:t>LLaMA, Mistral, Gemma</a:t>
+              <a:rPr sz="1600">
+                <a:solidFill>
+                  <a:srgbClr val="FFFFFF"/>
+                </a:solidFill>
+              </a:rPr>
+              <a:t>The grader was simple:  does the checker accept the proof?  Pass or fail.</a:t>
             </a:r>
           </a:p>
           <a:p>
             <a:pPr>
               <a:spcAft>
-                <a:spcPts val="600"/>
+                <a:spcPts val="800"/>
               </a:spcAft>
             </a:pPr>
             <a:r>
-              <a:rPr sz="1200"/>
-              <a:t>Trained on internet text &amp; code</a:t>
+              <a:rPr sz="1600">
+                <a:solidFill>
+                  <a:srgbClr val="FFFFFF"/>
+                </a:solidFill>
+              </a:rPr>
+              <a:t>The model learned to cheat.  It wrote proofs like "true is true" — empty statements the checker accepts but that prove nothing.</a:t>
             </a:r>
           </a:p>
           <a:p>
             <a:pPr>
               <a:spcAft>
-                <a:spcPts val="600"/>
+                <a:spcPts val="800"/>
               </a:spcAft>
             </a:pPr>
             <a:r>
-              <a:rPr sz="1200"/>
-              <a:t>Good at familiar languages</a:t>
+              <a:rPr sz="1600">
+                <a:solidFill>
+                  <a:srgbClr val="FFFFFF"/>
+                </a:solidFill>
+              </a:rPr>
+              <a:t>We call this the Vacuity Attractor.  In controlled tests, 97% of the AI's output converged on empty proofs.  Every seed.  Every time.</a:t>
             </a:r>
           </a:p>
           <a:p>
             <a:pPr>
               <a:spcAft>
-                <a:spcPts val="600"/>
+                <a:spcPts val="800"/>
               </a:spcAft>
             </a:pPr>
             <a:r>
-              <a:rPr sz="1200"/>
-              <a:t>Struggle with TLA+ syntax</a:t>
+              <a:rPr sz="1600">
+                <a:solidFill>
+                  <a:srgbClr val="FFFFFF"/>
+                </a:solidFill>
+              </a:rPr>
+              <a:t>Lesson:  an honest-looking grade can still be a dishonest grade.</a:t>
             </a:r>
           </a:p>
         </p:txBody>
@@ -10392,57 +10395,14 @@
             <a:spLocks noGrp="1"/>
           </p:cNvSpPr>
           <p:nvPr>
-            <p:ph type="body" idx="18" sz="quarter"/>
+            <p:ph type="body" idx="16" sz="quarter"/>
           </p:nvPr>
         </p:nvSpPr>
         <p:spPr/>
         <p:txBody>
           <a:bodyPr/>
           <a:lstStyle/>
-          <a:p>
-            <a:pPr>
-              <a:spcAft>
-                <a:spcPts val="600"/>
-              </a:spcAft>
-            </a:pPr>
-            <a:r>
-              <a:rPr sz="1200"/>
-              <a:t>Qwen-Coder, CodeLLaMA</a:t>
-            </a:r>
-          </a:p>
-          <a:p>
-            <a:pPr>
-              <a:spcAft>
-                <a:spcPts val="600"/>
-              </a:spcAft>
-            </a:pPr>
-            <a:r>
-              <a:rPr sz="1200"/>
-              <a:t>Trained on Python, JS, etc.</a:t>
-            </a:r>
-          </a:p>
-          <a:p>
-            <a:pPr>
-              <a:spcAft>
-                <a:spcPts val="600"/>
-              </a:spcAft>
-            </a:pPr>
-            <a:r>
-              <a:rPr sz="1200"/>
-              <a:t>Surprisingly worst at TLA+</a:t>
-            </a:r>
-          </a:p>
-          <a:p>
-            <a:pPr>
-              <a:spcAft>
-                <a:spcPts val="600"/>
-              </a:spcAft>
-            </a:pPr>
-            <a:r>
-              <a:rPr sz="1200"/>
-              <a:t>Negative transfer effect</a:t>
-            </a:r>
-          </a:p>
+          <a:p/>
         </p:txBody>
       </p:sp>
       <p:sp>
@@ -10452,7 +10412,7 @@
             <a:spLocks noGrp="1"/>
           </p:cNvSpPr>
           <p:nvPr>
-            <p:ph type="body" idx="20" sz="quarter"/>
+            <p:ph type="body" idx="22" sz="quarter"/>
           </p:nvPr>
         </p:nvSpPr>
         <p:spPr/>
@@ -10460,47 +10420,9 @@
           <a:bodyPr/>
           <a:lstStyle/>
           <a:p>
-            <a:pPr>
-              <a:spcAft>
-                <a:spcPts val="600"/>
-              </a:spcAft>
-            </a:pPr>
-            <a:r>
-              <a:rPr sz="1200"/>
-              <a:t>DeepSeek R1, QwQ</a:t>
-            </a:r>
-          </a:p>
-          <a:p>
-            <a:pPr>
-              <a:spcAft>
-                <a:spcPts val="600"/>
-              </a:spcAft>
-            </a:pPr>
-            <a:r>
-              <a:rPr sz="1200"/>
-              <a:t>Think step-by-step</a:t>
-            </a:r>
-          </a:p>
-          <a:p>
-            <a:pPr>
-              <a:spcAft>
-                <a:spcPts val="600"/>
-              </a:spcAft>
-            </a:pPr>
-            <a:r>
-              <a:rPr sz="1200"/>
-              <a:t>Best at logical structure</a:t>
-            </a:r>
-          </a:p>
-          <a:p>
-            <a:pPr>
-              <a:spcAft>
-                <a:spcPts val="600"/>
-              </a:spcAft>
-            </a:pPr>
-            <a:r>
-              <a:rPr sz="1200"/>
-              <a:t>Top performers overall</a:t>
+            <a:r>
+              <a:rPr sz="1400"/>
+              <a:t>We fine-tuned a language model using the proof checker as its grader.</a:t>
             </a:r>
           </a:p>
         </p:txBody>
@@ -10512,100 +10434,17 @@
             <a:spLocks noGrp="1"/>
           </p:cNvSpPr>
           <p:nvPr>
-            <p:ph type="body" idx="16" sz="quarter"/>
+            <p:ph type="body" idx="11" sz="quarter"/>
           </p:nvPr>
         </p:nvSpPr>
         <p:spPr/>
         <p:txBody>
           <a:bodyPr/>
           <a:lstStyle/>
-          <a:p/>
-        </p:txBody>
-      </p:sp>
-      <p:sp>
-        <p:nvSpPr>
-          <p:cNvPr id="6" name="Text Placeholder 5"/>
-          <p:cNvSpPr>
-            <a:spLocks noGrp="1"/>
-          </p:cNvSpPr>
-          <p:nvPr>
-            <p:ph type="body" idx="22" sz="quarter"/>
-          </p:nvPr>
-        </p:nvSpPr>
-        <p:spPr/>
-        <p:txBody>
-          <a:bodyPr/>
-          <a:lstStyle/>
-          <a:p>
-            <a:r>
-              <a:rPr sz="1300" b="1"/>
-              <a:t>Basic Models</a:t>
-            </a:r>
-          </a:p>
-        </p:txBody>
-      </p:sp>
-      <p:sp>
-        <p:nvSpPr>
-          <p:cNvPr id="7" name="Text Placeholder 6"/>
-          <p:cNvSpPr>
-            <a:spLocks noGrp="1"/>
-          </p:cNvSpPr>
-          <p:nvPr>
-            <p:ph type="body" idx="11" sz="quarter"/>
-          </p:nvPr>
-        </p:nvSpPr>
-        <p:spPr/>
-        <p:txBody>
-          <a:bodyPr/>
-          <a:lstStyle/>
-          <a:p>
-            <a:r>
-              <a:rPr sz="2800" b="1"/>
-              <a:t>Three Kinds of AI Models</a:t>
-            </a:r>
-          </a:p>
-        </p:txBody>
-      </p:sp>
-      <p:sp>
-        <p:nvSpPr>
-          <p:cNvPr id="8" name="Text Placeholder 7"/>
-          <p:cNvSpPr>
-            <a:spLocks noGrp="1"/>
-          </p:cNvSpPr>
-          <p:nvPr>
-            <p:ph type="body" idx="23" sz="quarter"/>
-          </p:nvPr>
-        </p:nvSpPr>
-        <p:spPr/>
-        <p:txBody>
-          <a:bodyPr/>
-          <a:lstStyle/>
-          <a:p>
-            <a:r>
-              <a:rPr sz="1300" b="1"/>
-              <a:t>Reasoning Models</a:t>
-            </a:r>
-          </a:p>
-        </p:txBody>
-      </p:sp>
-      <p:sp>
-        <p:nvSpPr>
-          <p:cNvPr id="9" name="Text Placeholder 8"/>
-          <p:cNvSpPr>
-            <a:spLocks noGrp="1"/>
-          </p:cNvSpPr>
-          <p:nvPr>
-            <p:ph type="body" idx="24" sz="quarter"/>
-          </p:nvPr>
-        </p:nvSpPr>
-        <p:spPr/>
-        <p:txBody>
-          <a:bodyPr/>
-          <a:lstStyle/>
-          <a:p>
-            <a:r>
-              <a:rPr sz="1300" b="1"/>
-              <a:t>Code-Specialized</a:t>
+          <a:p>
+            <a:r>
+              <a:rPr sz="3000" b="1"/>
+              <a:t>What Happened When We Tried</a:t>
             </a:r>
           </a:p>
         </p:txBody>
@@ -10645,76 +10484,83 @@
           <a:p>
             <a:pPr>
               <a:spcAft>
-                <a:spcPts val="600"/>
+                <a:spcPts val="800"/>
               </a:spcAft>
             </a:pPr>
             <a:r>
-              <a:rPr sz="1500">
+              <a:rPr sz="1600">
                 <a:solidFill>
                   <a:srgbClr val="FFFFFF"/>
                 </a:solidFill>
               </a:rPr>
-              <a:t>Best syntactic correctness (SANY):  26.6%</a:t>
+              <a:t>A real proof catches deliberate sabotage.  An empty proof does not.  This is the Diamond reward.</a:t>
             </a:r>
           </a:p>
           <a:p>
             <a:pPr>
               <a:spcAft>
-                <a:spcPts val="600"/>
+                <a:spcPts val="800"/>
               </a:spcAft>
             </a:pPr>
             <a:r>
-              <a:rPr sz="1500">
+              <a:rPr sz="1600">
                 <a:solidFill>
                   <a:srgbClr val="FFFFFF"/>
                 </a:solidFill>
               </a:rPr>
-              <a:t>Best semantic correctness (TLC):  8.6%</a:t>
+              <a:t>Result:  success on a held-out benchmark more than doubled (from 4 out of 30 up to 9 out of 30).</a:t>
             </a:r>
           </a:p>
           <a:p>
             <a:pPr>
               <a:spcAft>
-                <a:spcPts val="600"/>
+                <a:spcPts val="800"/>
               </a:spcAft>
             </a:pPr>
             <a:r>
-              <a:rPr sz="1500">
+              <a:rPr sz="1600">
                 <a:solidFill>
                   <a:srgbClr val="FFFFFF"/>
                 </a:solidFill>
               </a:rPr>
-              <a:t>Semantic success only under progressive prompting -- no other strategy worked</a:t>
+              <a:t>The whole project ran on one workstation with two graphics cards — about the power of a hair dryer.</a:t>
             </a:r>
           </a:p>
           <a:p>
             <a:pPr>
               <a:spcAft>
-                <a:spcPts val="600"/>
+                <a:spcPts val="800"/>
               </a:spcAft>
             </a:pPr>
             <a:r>
-              <a:rPr sz="1500">
+              <a:rPr sz="1600">
                 <a:solidFill>
                   <a:srgbClr val="FFFFFF"/>
                 </a:solidFill>
               </a:rPr>
-              <a:t>Model size does not predict quality -- 8B model beat its 70B variant</a:t>
+              <a:t>No supercomputer.  No data center.  Anyone can reproduce it.</a:t>
             </a:r>
           </a:p>
           <a:p>
             <a:pPr>
               <a:spcAft>
-                <a:spcPts val="600"/>
+                <a:spcPts val="800"/>
               </a:spcAft>
             </a:pPr>
-            <a:r>
-              <a:rPr sz="1500">
+          </a:p>
+          <a:p>
+            <a:pPr>
+              <a:spcAft>
+                <a:spcPts val="800"/>
+              </a:spcAft>
+            </a:pPr>
+            <a:r>
+              <a:rPr sz="1600">
                 <a:solidFill>
                   <a:srgbClr val="FFFFFF"/>
                 </a:solidFill>
               </a:rPr>
-              <a:t>Code-specialized training hurts TLA+ performance (negative transfer)</a:t>
+              <a:t>Thank you.   ai4fm.cs.luc.edu</a:t>
             </a:r>
           </a:p>
         </p:txBody>
@@ -10752,8 +10598,8 @@
           <a:lstStyle/>
           <a:p>
             <a:r>
-              <a:rPr sz="1200"/>
-              <a:t>30 models  |  205 specifications  |  2,730 evaluation runs</a:t>
+              <a:rPr sz="1400"/>
+              <a:t>Grade the proof by breaking the program and asking whether the proof notices.</a:t>
             </a:r>
           </a:p>
         </p:txBody>
@@ -10774,220 +10620,8 @@
           <a:lstStyle/>
           <a:p>
             <a:r>
-              <a:rPr sz="2800" b="1"/>
-              <a:t>Key Results</a:t>
-            </a:r>
-          </a:p>
-        </p:txBody>
-      </p:sp>
-    </p:spTree>
-  </p:cSld>
-  <p:clrMapOvr>
-    <a:masterClrMapping/>
-  </p:clrMapOvr>
-</p:sld>
-</file>
-
-<file path=ppt/slides/slide5.xml><?xml version="1.0" encoding="utf-8"?>
-<p:sld xmlns:a="http://schemas.openxmlformats.org/drawingml/2006/main" xmlns:p="http://schemas.openxmlformats.org/presentationml/2006/main" xmlns:r="http://schemas.openxmlformats.org/officeDocument/2006/relationships">
-  <p:cSld>
-    <p:spTree>
-      <p:nvGrpSpPr>
-        <p:cNvPr id="1" name=""/>
-        <p:cNvGrpSpPr/>
-        <p:nvPr/>
-      </p:nvGrpSpPr>
-      <p:grpSpPr/>
-      <p:sp>
-        <p:nvSpPr>
-          <p:cNvPr id="2" name="Text Placeholder 1"/>
-          <p:cNvSpPr>
-            <a:spLocks noGrp="1"/>
-          </p:cNvSpPr>
-          <p:nvPr>
-            <p:ph type="body" idx="10" sz="quarter"/>
-          </p:nvPr>
-        </p:nvSpPr>
-        <p:spPr/>
-        <p:txBody>
-          <a:bodyPr/>
-          <a:lstStyle/>
-          <a:p>
-            <a:pPr>
-              <a:spcAft>
-                <a:spcPts val="600"/>
-              </a:spcAft>
-            </a:pPr>
-            <a:r>
-              <a:rPr sz="1400"/>
-              <a:t>Start with 205 expert-verified TLA+ specifications as training data</a:t>
-            </a:r>
-          </a:p>
-          <a:p>
-            <a:pPr>
-              <a:spcAft>
-                <a:spcPts val="600"/>
-              </a:spcAft>
-            </a:pPr>
-            <a:r>
-              <a:rPr sz="1400"/>
-              <a:t>Fine-tune a 20B-parameter model specifically for TLA+ generation</a:t>
-            </a:r>
-          </a:p>
-          <a:p>
-            <a:pPr>
-              <a:spcAft>
-                <a:spcPts val="600"/>
-              </a:spcAft>
-            </a:pPr>
-            <a:r>
-              <a:rPr sz="1400"/>
-              <a:t>Key insight: use TLC (the model checker) as the training signal -- a spec is only "correct" if TLC says so</a:t>
-            </a:r>
-          </a:p>
-          <a:p>
-            <a:pPr>
-              <a:spcAft>
-                <a:spcPts val="600"/>
-              </a:spcAft>
-            </a:pPr>
-            <a:r>
-              <a:rPr sz="1400"/>
-              <a:t>Autonomous loop: generate specs -&gt; validate with TLC -&gt; retrain on successes</a:t>
-            </a:r>
-          </a:p>
-          <a:p>
-            <a:pPr>
-              <a:spcAft>
-                <a:spcPts val="600"/>
-              </a:spcAft>
-            </a:pPr>
-            <a:r>
-              <a:rPr sz="1400"/>
-              <a:t>The model checker provides a perfect, automatic grading signal -- unlike most AI tasks</a:t>
-            </a:r>
-          </a:p>
-        </p:txBody>
-      </p:sp>
-      <p:sp>
-        <p:nvSpPr>
-          <p:cNvPr id="3" name="Text Placeholder 2"/>
-          <p:cNvSpPr>
-            <a:spLocks noGrp="1"/>
-          </p:cNvSpPr>
-          <p:nvPr>
-            <p:ph type="body" idx="12" sz="quarter"/>
-          </p:nvPr>
-        </p:nvSpPr>
-        <p:spPr/>
-        <p:txBody>
-          <a:bodyPr/>
-          <a:lstStyle/>
-          <a:p>
-            <a:r>
-              <a:rPr sz="1300"/>
-              <a:t>Fine-tuning + self-improvement with model-checker feedback</a:t>
-            </a:r>
-          </a:p>
-        </p:txBody>
-      </p:sp>
-      <p:sp>
-        <p:nvSpPr>
-          <p:cNvPr id="4" name="Text Placeholder 3"/>
-          <p:cNvSpPr>
-            <a:spLocks noGrp="1"/>
-          </p:cNvSpPr>
-          <p:nvPr>
-            <p:ph type="body" idx="11" sz="quarter"/>
-          </p:nvPr>
-        </p:nvSpPr>
-        <p:spPr/>
-        <p:txBody>
-          <a:bodyPr/>
-          <a:lstStyle/>
-          <a:p>
-            <a:r>
-              <a:rPr sz="2800" b="1"/>
-              <a:t>Building a Better Model: ChatTLA</a:t>
-            </a:r>
-          </a:p>
-        </p:txBody>
-      </p:sp>
-      <p:sp>
-        <p:nvSpPr>
-          <p:cNvPr id="5" name="Text Placeholder 4"/>
-          <p:cNvSpPr>
-            <a:spLocks noGrp="1"/>
-          </p:cNvSpPr>
-          <p:nvPr>
-            <p:ph type="body" idx="17" sz="quarter"/>
-          </p:nvPr>
-        </p:nvSpPr>
-        <p:spPr/>
-        <p:txBody>
-          <a:bodyPr/>
-          <a:lstStyle/>
-          <a:p/>
-        </p:txBody>
-      </p:sp>
-    </p:spTree>
-  </p:cSld>
-  <p:clrMapOvr>
-    <a:masterClrMapping/>
-  </p:clrMapOvr>
-</p:sld>
-</file>
-
-<file path=ppt/slides/slide6.xml><?xml version="1.0" encoding="utf-8"?>
-<p:sld xmlns:a="http://schemas.openxmlformats.org/drawingml/2006/main" xmlns:p="http://schemas.openxmlformats.org/presentationml/2006/main" xmlns:r="http://schemas.openxmlformats.org/officeDocument/2006/relationships">
-  <p:cSld>
-    <p:spTree>
-      <p:nvGrpSpPr>
-        <p:cNvPr id="1" name=""/>
-        <p:cNvGrpSpPr/>
-        <p:nvPr/>
-      </p:nvGrpSpPr>
-      <p:grpSpPr/>
-      <p:sp>
-        <p:nvSpPr>
-          <p:cNvPr id="2" name="Text Placeholder 1"/>
-          <p:cNvSpPr>
-            <a:spLocks noGrp="1"/>
-          </p:cNvSpPr>
-          <p:nvPr>
-            <p:ph type="body" idx="12" sz="quarter"/>
-          </p:nvPr>
-        </p:nvSpPr>
-        <p:spPr/>
-        <p:txBody>
-          <a:bodyPr/>
-          <a:lstStyle/>
-          <a:p>
-            <a:r>
-              <a:rPr sz="1400"/>
-              <a:t>ai4fm.cs.luc.edu</a:t>
-            </a:r>
-          </a:p>
-        </p:txBody>
-      </p:sp>
-      <p:sp>
-        <p:nvSpPr>
-          <p:cNvPr id="3" name="Text Placeholder 2"/>
-          <p:cNvSpPr>
-            <a:spLocks noGrp="1"/>
-          </p:cNvSpPr>
-          <p:nvPr>
-            <p:ph type="body" idx="11" sz="quarter"/>
-          </p:nvPr>
-        </p:nvSpPr>
-        <p:spPr/>
-        <p:txBody>
-          <a:bodyPr/>
-          <a:lstStyle/>
-          <a:p>
-            <a:r>
-              <a:rPr sz="3600" b="1"/>
-              <a:t>Thank You</a:t>
+              <a:rPr sz="3200" b="1"/>
+              <a:t>The Fix</a:t>
             </a:r>
           </a:p>
         </p:txBody>
